--- a/mignon-avvento/export/tavole-story-1080x1920.pptx
+++ b/mignon-avvento/export/tavole-story-1080x1920.pptx
@@ -3312,7 +3312,7 @@
         <p:spPr>
           <a:xfrm>
             <a:off x="3086100" y="6667500"/>
-            <a:ext cx="552450" cy="2667000"/>
+            <a:ext cx="476250" cy="2667000"/>
           </a:xfrm>
           <a:prstGeom prst="rect">
             <a:avLst/>
@@ -3336,7 +3336,7 @@
         <p:spPr>
           <a:xfrm>
             <a:off x="3619500" y="6667500"/>
-            <a:ext cx="571500" cy="2667000"/>
+            <a:ext cx="409575" cy="2667000"/>
           </a:xfrm>
           <a:prstGeom prst="rect">
             <a:avLst/>
@@ -3360,7 +3360,7 @@
         <p:spPr>
           <a:xfrm>
             <a:off x="4152900" y="6667500"/>
-            <a:ext cx="571500" cy="2667000"/>
+            <a:ext cx="361950" cy="2667000"/>
           </a:xfrm>
           <a:prstGeom prst="rect">
             <a:avLst/>
@@ -3408,7 +3408,7 @@
         <p:spPr>
           <a:xfrm>
             <a:off x="5219700" y="6667500"/>
-            <a:ext cx="552450" cy="2667000"/>
+            <a:ext cx="476250" cy="2667000"/>
           </a:xfrm>
           <a:prstGeom prst="rect">
             <a:avLst/>
@@ -3432,7 +3432,7 @@
         <p:spPr>
           <a:xfrm>
             <a:off x="5753100" y="6667500"/>
-            <a:ext cx="571500" cy="2667000"/>
+            <a:ext cx="409575" cy="2667000"/>
           </a:xfrm>
           <a:prstGeom prst="rect">
             <a:avLst/>
@@ -3456,7 +3456,7 @@
         <p:spPr>
           <a:xfrm>
             <a:off x="6286500" y="6667500"/>
-            <a:ext cx="571500" cy="2667000"/>
+            <a:ext cx="361950" cy="2667000"/>
           </a:xfrm>
           <a:prstGeom prst="rect">
             <a:avLst/>
@@ -3504,7 +3504,7 @@
         <p:spPr>
           <a:xfrm>
             <a:off x="7353300" y="6667500"/>
-            <a:ext cx="552450" cy="2667000"/>
+            <a:ext cx="476250" cy="2667000"/>
           </a:xfrm>
           <a:prstGeom prst="rect">
             <a:avLst/>
@@ -4030,7 +4030,7 @@
         <p:spPr>
           <a:xfrm>
             <a:off x="4533900" y="12382500"/>
-            <a:ext cx="590550" cy="2857500"/>
+            <a:ext cx="514350" cy="2857500"/>
           </a:xfrm>
           <a:prstGeom prst="rect">
             <a:avLst/>
@@ -4054,7 +4054,7 @@
         <p:spPr>
           <a:xfrm>
             <a:off x="5257800" y="12382500"/>
-            <a:ext cx="609600" cy="2857500"/>
+            <a:ext cx="438150" cy="2857500"/>
           </a:xfrm>
           <a:prstGeom prst="rect">
             <a:avLst/>
@@ -4078,7 +4078,7 @@
         <p:spPr>
           <a:xfrm>
             <a:off x="5981700" y="12382500"/>
-            <a:ext cx="609600" cy="2857500"/>
+            <a:ext cx="390525" cy="2857500"/>
           </a:xfrm>
           <a:prstGeom prst="rect">
             <a:avLst/>
@@ -4087,7 +4087,7 @@
       </p:pic>
       <p:pic>
         <p:nvPicPr>
-          <p:cNvPr id="13" name="Picture 12" descr="logo-chiaro.png"/>
+          <p:cNvPr id="13" name="Picture 12" descr="bottiglie.png"/>
           <p:cNvPicPr>
             <a:picLocks noChangeAspect="1"/>
           </p:cNvPicPr>
@@ -4101,14 +4101,92 @@
         </p:blipFill>
         <p:spPr>
           <a:xfrm>
-            <a:off x="3857625" y="15716250"/>
-            <a:ext cx="2571750" cy="2190750"/>
+            <a:off x="5143500" y="15049500"/>
+            <a:ext cx="1524000" cy="1809750"/>
           </a:xfrm>
           <a:prstGeom prst="rect">
             <a:avLst/>
           </a:prstGeom>
         </p:spPr>
       </p:pic>
+      <p:sp>
+        <p:nvSpPr>
+          <p:cNvPr id="14" name="TextBox 13"/>
+          <p:cNvSpPr txBox="1"/>
+          <p:nvPr/>
+        </p:nvSpPr>
+        <p:spPr>
+          <a:xfrm>
+            <a:off x="3890010" y="17097375"/>
+            <a:ext cx="4030980" cy="613409"/>
+          </a:xfrm>
+          <a:prstGeom prst="rect">
+            <a:avLst/>
+          </a:prstGeom>
+          <a:noFill/>
+        </p:spPr>
+        <p:txBody>
+          <a:bodyPr wrap="square" lIns="0" rIns="0" tIns="0" bIns="0" anchor="t">
+            <a:spAutoFit/>
+          </a:bodyPr>
+          <a:lstStyle/>
+          <a:p>
+            <a:pPr algn="ctr">
+              <a:lnSpc>
+                <a:spcPct val="105000"/>
+              </a:lnSpc>
+            </a:pPr>
+            <a:r>
+              <a:rPr sz="3450" b="1" i="0">
+                <a:solidFill>
+                  <a:srgbClr val="F3ECE2"/>
+                </a:solidFill>
+                <a:latin typeface="Montserrat"/>
+              </a:rPr>
+              <a:t>Mignon Experience</a:t>
+            </a:r>
+          </a:p>
+        </p:txBody>
+      </p:sp>
+      <p:sp>
+        <p:nvSpPr>
+          <p:cNvPr id="15" name="TextBox 14"/>
+          <p:cNvSpPr txBox="1"/>
+          <p:nvPr/>
+        </p:nvSpPr>
+        <p:spPr>
+          <a:xfrm>
+            <a:off x="3890010" y="17688877"/>
+            <a:ext cx="4030980" cy="361950"/>
+          </a:xfrm>
+          <a:prstGeom prst="rect">
+            <a:avLst/>
+          </a:prstGeom>
+          <a:noFill/>
+        </p:spPr>
+        <p:txBody>
+          <a:bodyPr wrap="square" lIns="0" rIns="0" tIns="0" bIns="0" anchor="t">
+            <a:spAutoFit/>
+          </a:bodyPr>
+          <a:lstStyle/>
+          <a:p>
+            <a:pPr algn="ctr">
+              <a:lnSpc>
+                <a:spcPct val="125000"/>
+              </a:lnSpc>
+            </a:pPr>
+            <a:r>
+              <a:rPr sz="1425" b="0" i="0" spc="427">
+                <a:solidFill>
+                  <a:srgbClr val="A2968A"/>
+                </a:solidFill>
+                <a:latin typeface="Montserrat"/>
+              </a:rPr>
+              <a:t>LE PIÙ PICCOLE</a:t>
+            </a:r>
+          </a:p>
+        </p:txBody>
+      </p:sp>
     </p:spTree>
   </p:cSld>
   <p:clrMapOvr>
